--- a/fixtures/rules/accent-overuse--pos.pptx
+++ b/fixtures/rules/accent-overuse--pos.pptx
@@ -634,7 +634,7 @@
           <a:noFill/>
         </p:spPr>
         <p:txBody>
-          <a:bodyPr vert="horz" wrap="square" lIns="0" tIns="0" rIns="0" bIns="0" rtlCol="0" anchor="t">
+          <a:bodyPr vert="horz" wrap="square" lIns="0" tIns="0" rIns="0" bIns="18582" rtlCol="0" anchor="b">
             <a:noAutofit/>
           </a:bodyPr>
           <a:lstStyle>
@@ -1133,7 +1133,7 @@
           <a:noFill/>
         </p:spPr>
         <p:txBody>
-          <a:bodyPr vert="horz" wrap="square" lIns="0" tIns="0" rIns="0" bIns="0" rtlCol="0" anchor="t">
+          <a:bodyPr vert="horz" wrap="square" lIns="0" tIns="0" rIns="0" bIns="13514" rtlCol="0" anchor="b">
             <a:noAutofit/>
           </a:bodyPr>
           <a:lstStyle>
@@ -1314,7 +1314,7 @@
           <a:noFill/>
         </p:spPr>
         <p:txBody>
-          <a:bodyPr vert="horz" wrap="square" lIns="0" tIns="0" rIns="0" bIns="0" rtlCol="0" anchor="t">
+          <a:bodyPr vert="horz" wrap="square" lIns="0" tIns="0" rIns="0" bIns="13514" rtlCol="0" anchor="b">
             <a:noAutofit/>
           </a:bodyPr>
           <a:lstStyle>
@@ -1676,7 +1676,7 @@
           <a:noFill/>
         </p:spPr>
         <p:txBody>
-          <a:bodyPr vert="horz" wrap="square" lIns="0" tIns="0" rIns="0" bIns="0" rtlCol="0" anchor="t">
+          <a:bodyPr vert="horz" wrap="square" lIns="0" tIns="0" rIns="0" bIns="18582" rtlCol="0" anchor="b">
             <a:noAutofit/>
           </a:bodyPr>
           <a:lstStyle>

--- a/fixtures/rules/accent-overuse--pos.pptx
+++ b/fixtures/rules/accent-overuse--pos.pptx
@@ -634,7 +634,7 @@
           <a:noFill/>
         </p:spPr>
         <p:txBody>
-          <a:bodyPr vert="horz" wrap="square" lIns="0" tIns="0" rIns="0" bIns="18582" rtlCol="0" anchor="b">
+          <a:bodyPr vert="horz" wrap="square" lIns="0" tIns="0" rIns="0" bIns="41910" rtlCol="0" anchor="b">
             <a:noAutofit/>
           </a:bodyPr>
           <a:lstStyle>
@@ -1133,7 +1133,7 @@
           <a:noFill/>
         </p:spPr>
         <p:txBody>
-          <a:bodyPr vert="horz" wrap="square" lIns="0" tIns="0" rIns="0" bIns="13514" rtlCol="0" anchor="b">
+          <a:bodyPr vert="horz" wrap="square" lIns="0" tIns="0" rIns="0" bIns="30480" rtlCol="0" anchor="b">
             <a:noAutofit/>
           </a:bodyPr>
           <a:lstStyle>
@@ -1314,7 +1314,7 @@
           <a:noFill/>
         </p:spPr>
         <p:txBody>
-          <a:bodyPr vert="horz" wrap="square" lIns="0" tIns="0" rIns="0" bIns="13514" rtlCol="0" anchor="b">
+          <a:bodyPr vert="horz" wrap="square" lIns="0" tIns="0" rIns="0" bIns="30480" rtlCol="0" anchor="b">
             <a:noAutofit/>
           </a:bodyPr>
           <a:lstStyle>
@@ -1676,7 +1676,7 @@
           <a:noFill/>
         </p:spPr>
         <p:txBody>
-          <a:bodyPr vert="horz" wrap="square" lIns="0" tIns="0" rIns="0" bIns="18582" rtlCol="0" anchor="b">
+          <a:bodyPr vert="horz" wrap="square" lIns="0" tIns="0" rIns="0" bIns="41910" rtlCol="0" anchor="b">
             <a:noAutofit/>
           </a:bodyPr>
           <a:lstStyle>

--- a/fixtures/rules/accent-overuse--pos.pptx
+++ b/fixtures/rules/accent-overuse--pos.pptx
@@ -26,6 +26,7 @@
           <a:srgbClr val="111111"/>
         </a:solidFill>
         <a:latin typeface="+mn-lt"/>
+        <a:cs typeface="+mn-cs"/>
       </a:defRPr>
     </a:lvl1pPr>
     <a:lvl2pPr marL="0" indent="0" algn="l">
@@ -44,6 +45,7 @@
           <a:srgbClr val="111111"/>
         </a:solidFill>
         <a:latin typeface="+mn-lt"/>
+        <a:cs typeface="+mn-cs"/>
       </a:defRPr>
     </a:lvl2pPr>
     <a:lvl3pPr marL="0" indent="0" algn="l">
@@ -62,6 +64,7 @@
           <a:srgbClr val="111111"/>
         </a:solidFill>
         <a:latin typeface="+mn-lt"/>
+        <a:cs typeface="+mn-cs"/>
       </a:defRPr>
     </a:lvl3pPr>
     <a:lvl4pPr marL="0" indent="0" algn="l">
@@ -80,6 +83,7 @@
           <a:srgbClr val="111111"/>
         </a:solidFill>
         <a:latin typeface="+mn-lt"/>
+        <a:cs typeface="+mn-cs"/>
       </a:defRPr>
     </a:lvl4pPr>
     <a:lvl5pPr marL="0" indent="0" algn="l">
@@ -98,6 +102,7 @@
           <a:srgbClr val="111111"/>
         </a:solidFill>
         <a:latin typeface="+mn-lt"/>
+        <a:cs typeface="+mn-cs"/>
       </a:defRPr>
     </a:lvl5pPr>
     <a:lvl6pPr marL="0" indent="0" algn="l">
@@ -116,6 +121,7 @@
           <a:srgbClr val="111111"/>
         </a:solidFill>
         <a:latin typeface="+mn-lt"/>
+        <a:cs typeface="+mn-cs"/>
       </a:defRPr>
     </a:lvl6pPr>
     <a:lvl7pPr marL="0" indent="0" algn="l">
@@ -134,6 +140,7 @@
           <a:srgbClr val="111111"/>
         </a:solidFill>
         <a:latin typeface="+mn-lt"/>
+        <a:cs typeface="+mn-cs"/>
       </a:defRPr>
     </a:lvl7pPr>
     <a:lvl8pPr marL="0" indent="0" algn="l">
@@ -152,6 +159,7 @@
           <a:srgbClr val="111111"/>
         </a:solidFill>
         <a:latin typeface="+mn-lt"/>
+        <a:cs typeface="+mn-cs"/>
       </a:defRPr>
     </a:lvl8pPr>
     <a:lvl9pPr marL="0" indent="0" algn="l">
@@ -170,6 +178,7 @@
           <a:srgbClr val="111111"/>
         </a:solidFill>
         <a:latin typeface="+mn-lt"/>
+        <a:cs typeface="+mn-cs"/>
       </a:defRPr>
     </a:lvl9pPr>
   </p:defaultTextStyle>
@@ -654,6 +663,7 @@
                   <a:srgbClr val="111111"/>
                 </a:solidFill>
                 <a:latin typeface="+mj-lt"/>
+                <a:cs typeface="+mj-cs"/>
               </a:defRPr>
             </a:lvl1pPr>
           </a:lstStyle>
@@ -706,6 +716,7 @@
                   <a:srgbClr val="111111"/>
                 </a:solidFill>
                 <a:latin typeface="+mn-lt"/>
+                <a:cs typeface="+mn-cs"/>
               </a:defRPr>
             </a:lvl1pPr>
           </a:lstStyle>
@@ -758,6 +769,7 @@
                   <a:srgbClr val="5C5C5A"/>
                 </a:solidFill>
                 <a:latin typeface="+mn-lt"/>
+                <a:cs typeface="+mn-cs"/>
               </a:defRPr>
             </a:lvl1pPr>
           </a:lstStyle>
@@ -843,6 +855,7 @@
                   <a:srgbClr val="F2F2F0"/>
                 </a:solidFill>
                 <a:latin typeface="+mj-lt"/>
+                <a:cs typeface="+mj-cs"/>
               </a:defRPr>
             </a:lvl1pPr>
           </a:lstStyle>
@@ -895,6 +908,7 @@
                   <a:srgbClr val="E8422E"/>
                 </a:solidFill>
                 <a:latin typeface="+mn-lt"/>
+                <a:cs typeface="+mn-cs"/>
               </a:defRPr>
             </a:lvl1pPr>
           </a:lstStyle>
@@ -972,6 +986,7 @@
                   <a:srgbClr val="111111"/>
                 </a:solidFill>
                 <a:latin typeface="+mj-lt"/>
+                <a:cs typeface="+mj-cs"/>
               </a:defRPr>
             </a:lvl1pPr>
           </a:lstStyle>
@@ -1024,6 +1039,7 @@
                   <a:srgbClr val="111111"/>
                 </a:solidFill>
                 <a:latin typeface="+mn-lt"/>
+                <a:cs typeface="+mn-cs"/>
               </a:defRPr>
             </a:lvl1pPr>
           </a:lstStyle>
@@ -1076,6 +1092,7 @@
                   <a:srgbClr val="5C5C5A"/>
                 </a:solidFill>
                 <a:latin typeface="+mn-lt"/>
+                <a:cs typeface="+mn-cs"/>
               </a:defRPr>
             </a:lvl1pPr>
           </a:lstStyle>
@@ -1153,6 +1170,7 @@
                   <a:srgbClr val="111111"/>
                 </a:solidFill>
                 <a:latin typeface="+mj-lt"/>
+                <a:cs typeface="+mj-cs"/>
               </a:defRPr>
             </a:lvl1pPr>
           </a:lstStyle>
@@ -1205,6 +1223,7 @@
                   <a:srgbClr val="111111"/>
                 </a:solidFill>
                 <a:latin typeface="+mn-lt"/>
+                <a:cs typeface="+mn-cs"/>
               </a:defRPr>
             </a:lvl1pPr>
           </a:lstStyle>
@@ -1257,6 +1276,7 @@
                   <a:srgbClr val="5C5C5A"/>
                 </a:solidFill>
                 <a:latin typeface="+mn-lt"/>
+                <a:cs typeface="+mn-cs"/>
               </a:defRPr>
             </a:lvl1pPr>
           </a:lstStyle>
@@ -1334,6 +1354,7 @@
                   <a:srgbClr val="111111"/>
                 </a:solidFill>
                 <a:latin typeface="+mj-lt"/>
+                <a:cs typeface="+mj-cs"/>
               </a:defRPr>
             </a:lvl1pPr>
           </a:lstStyle>
@@ -1386,6 +1407,7 @@
                   <a:srgbClr val="111111"/>
                 </a:solidFill>
                 <a:latin typeface="+mn-lt"/>
+                <a:cs typeface="+mn-cs"/>
               </a:defRPr>
             </a:lvl1pPr>
           </a:lstStyle>
@@ -1438,6 +1460,7 @@
                   <a:srgbClr val="111111"/>
                 </a:solidFill>
                 <a:latin typeface="+mn-lt"/>
+                <a:cs typeface="+mn-cs"/>
               </a:defRPr>
             </a:lvl1pPr>
           </a:lstStyle>
@@ -1490,6 +1513,7 @@
                   <a:srgbClr val="5C5C5A"/>
                 </a:solidFill>
                 <a:latin typeface="+mn-lt"/>
+                <a:cs typeface="+mn-cs"/>
               </a:defRPr>
             </a:lvl1pPr>
           </a:lstStyle>
@@ -1567,6 +1591,7 @@
                   <a:srgbClr val="111111"/>
                 </a:solidFill>
                 <a:latin typeface="+mj-lt"/>
+                <a:cs typeface="+mj-cs"/>
               </a:defRPr>
             </a:lvl1pPr>
           </a:lstStyle>
@@ -1619,6 +1644,7 @@
                   <a:srgbClr val="5C5C5A"/>
                 </a:solidFill>
                 <a:latin typeface="+mn-lt"/>
+                <a:cs typeface="+mn-cs"/>
               </a:defRPr>
             </a:lvl1pPr>
           </a:lstStyle>
@@ -1696,6 +1722,7 @@
                   <a:srgbClr val="111111"/>
                 </a:solidFill>
                 <a:latin typeface="+mj-lt"/>
+                <a:cs typeface="+mj-cs"/>
               </a:defRPr>
             </a:lvl1pPr>
           </a:lstStyle>
@@ -1748,6 +1775,7 @@
                   <a:srgbClr val="111111"/>
                 </a:solidFill>
                 <a:latin typeface="+mn-lt"/>
+                <a:cs typeface="+mn-cs"/>
               </a:defRPr>
             </a:lvl1pPr>
           </a:lstStyle>
@@ -1800,6 +1828,7 @@
                   <a:srgbClr val="5C5C5A"/>
                 </a:solidFill>
                 <a:latin typeface="+mn-lt"/>
+                <a:cs typeface="+mn-cs"/>
               </a:defRPr>
             </a:lvl1pPr>
           </a:lstStyle>
@@ -1885,6 +1914,7 @@
                   <a:srgbClr val="111111"/>
                 </a:solidFill>
                 <a:latin typeface="+mj-lt"/>
+                <a:cs typeface="+mj-cs"/>
               </a:defRPr>
             </a:lvl1pPr>
           </a:lstStyle>
@@ -1937,6 +1967,7 @@
                   <a:srgbClr val="111111"/>
                 </a:solidFill>
                 <a:latin typeface="+mn-lt"/>
+                <a:cs typeface="+mn-cs"/>
               </a:defRPr>
             </a:lvl1pPr>
           </a:lstStyle>
@@ -1978,6 +2009,7 @@
             <a:srgbClr val="111111"/>
           </a:solidFill>
           <a:latin typeface="+mj-lt"/>
+          <a:cs typeface="+mj-cs"/>
         </a:defRPr>
       </a:lvl1pPr>
       <a:lvl2pPr marL="0" indent="0" algn="l">
@@ -1996,6 +2028,7 @@
             <a:srgbClr val="111111"/>
           </a:solidFill>
           <a:latin typeface="+mj-lt"/>
+          <a:cs typeface="+mj-cs"/>
         </a:defRPr>
       </a:lvl2pPr>
       <a:lvl3pPr marL="0" indent="0" algn="l">
@@ -2014,6 +2047,7 @@
             <a:srgbClr val="111111"/>
           </a:solidFill>
           <a:latin typeface="+mj-lt"/>
+          <a:cs typeface="+mj-cs"/>
         </a:defRPr>
       </a:lvl3pPr>
       <a:lvl4pPr marL="0" indent="0" algn="l">
@@ -2032,6 +2066,7 @@
             <a:srgbClr val="111111"/>
           </a:solidFill>
           <a:latin typeface="+mj-lt"/>
+          <a:cs typeface="+mj-cs"/>
         </a:defRPr>
       </a:lvl4pPr>
       <a:lvl5pPr marL="0" indent="0" algn="l">
@@ -2050,6 +2085,7 @@
             <a:srgbClr val="111111"/>
           </a:solidFill>
           <a:latin typeface="+mj-lt"/>
+          <a:cs typeface="+mj-cs"/>
         </a:defRPr>
       </a:lvl5pPr>
       <a:lvl6pPr marL="0" indent="0" algn="l">
@@ -2068,6 +2104,7 @@
             <a:srgbClr val="111111"/>
           </a:solidFill>
           <a:latin typeface="+mj-lt"/>
+          <a:cs typeface="+mj-cs"/>
         </a:defRPr>
       </a:lvl6pPr>
       <a:lvl7pPr marL="0" indent="0" algn="l">
@@ -2086,6 +2123,7 @@
             <a:srgbClr val="111111"/>
           </a:solidFill>
           <a:latin typeface="+mj-lt"/>
+          <a:cs typeface="+mj-cs"/>
         </a:defRPr>
       </a:lvl7pPr>
       <a:lvl8pPr marL="0" indent="0" algn="l">
@@ -2104,6 +2142,7 @@
             <a:srgbClr val="111111"/>
           </a:solidFill>
           <a:latin typeface="+mj-lt"/>
+          <a:cs typeface="+mj-cs"/>
         </a:defRPr>
       </a:lvl8pPr>
       <a:lvl9pPr marL="0" indent="0" algn="l">
@@ -2122,6 +2161,7 @@
             <a:srgbClr val="111111"/>
           </a:solidFill>
           <a:latin typeface="+mj-lt"/>
+          <a:cs typeface="+mj-cs"/>
         </a:defRPr>
       </a:lvl9pPr>
     </p:titleStyle>
@@ -2142,6 +2182,7 @@
             <a:srgbClr val="111111"/>
           </a:solidFill>
           <a:latin typeface="+mn-lt"/>
+          <a:cs typeface="+mn-cs"/>
         </a:defRPr>
       </a:lvl1pPr>
       <a:lvl2pPr marL="0" indent="0" algn="l">
@@ -2160,6 +2201,7 @@
             <a:srgbClr val="111111"/>
           </a:solidFill>
           <a:latin typeface="+mn-lt"/>
+          <a:cs typeface="+mn-cs"/>
         </a:defRPr>
       </a:lvl2pPr>
       <a:lvl3pPr marL="0" indent="0" algn="l">
@@ -2178,6 +2220,7 @@
             <a:srgbClr val="111111"/>
           </a:solidFill>
           <a:latin typeface="+mn-lt"/>
+          <a:cs typeface="+mn-cs"/>
         </a:defRPr>
       </a:lvl3pPr>
       <a:lvl4pPr marL="0" indent="0" algn="l">
@@ -2196,6 +2239,7 @@
             <a:srgbClr val="111111"/>
           </a:solidFill>
           <a:latin typeface="+mn-lt"/>
+          <a:cs typeface="+mn-cs"/>
         </a:defRPr>
       </a:lvl4pPr>
       <a:lvl5pPr marL="0" indent="0" algn="l">
@@ -2214,6 +2258,7 @@
             <a:srgbClr val="111111"/>
           </a:solidFill>
           <a:latin typeface="+mn-lt"/>
+          <a:cs typeface="+mn-cs"/>
         </a:defRPr>
       </a:lvl5pPr>
       <a:lvl6pPr marL="0" indent="0" algn="l">
@@ -2232,6 +2277,7 @@
             <a:srgbClr val="111111"/>
           </a:solidFill>
           <a:latin typeface="+mn-lt"/>
+          <a:cs typeface="+mn-cs"/>
         </a:defRPr>
       </a:lvl6pPr>
       <a:lvl7pPr marL="0" indent="0" algn="l">
@@ -2250,6 +2296,7 @@
             <a:srgbClr val="111111"/>
           </a:solidFill>
           <a:latin typeface="+mn-lt"/>
+          <a:cs typeface="+mn-cs"/>
         </a:defRPr>
       </a:lvl7pPr>
       <a:lvl8pPr marL="0" indent="0" algn="l">
@@ -2268,6 +2315,7 @@
             <a:srgbClr val="111111"/>
           </a:solidFill>
           <a:latin typeface="+mn-lt"/>
+          <a:cs typeface="+mn-cs"/>
         </a:defRPr>
       </a:lvl8pPr>
       <a:lvl9pPr marL="0" indent="0" algn="l">
@@ -2286,6 +2334,7 @@
             <a:srgbClr val="111111"/>
           </a:solidFill>
           <a:latin typeface="+mn-lt"/>
+          <a:cs typeface="+mn-cs"/>
         </a:defRPr>
       </a:lvl9pPr>
     </p:bodyStyle>
@@ -2306,6 +2355,7 @@
             <a:srgbClr val="111111"/>
           </a:solidFill>
           <a:latin typeface="+mn-lt"/>
+          <a:cs typeface="+mn-cs"/>
         </a:defRPr>
       </a:lvl1pPr>
       <a:lvl2pPr marL="0" indent="0" algn="l">
@@ -2324,6 +2374,7 @@
             <a:srgbClr val="111111"/>
           </a:solidFill>
           <a:latin typeface="+mn-lt"/>
+          <a:cs typeface="+mn-cs"/>
         </a:defRPr>
       </a:lvl2pPr>
       <a:lvl3pPr marL="0" indent="0" algn="l">
@@ -2342,6 +2393,7 @@
             <a:srgbClr val="111111"/>
           </a:solidFill>
           <a:latin typeface="+mn-lt"/>
+          <a:cs typeface="+mn-cs"/>
         </a:defRPr>
       </a:lvl3pPr>
       <a:lvl4pPr marL="0" indent="0" algn="l">
@@ -2360,6 +2412,7 @@
             <a:srgbClr val="111111"/>
           </a:solidFill>
           <a:latin typeface="+mn-lt"/>
+          <a:cs typeface="+mn-cs"/>
         </a:defRPr>
       </a:lvl4pPr>
       <a:lvl5pPr marL="0" indent="0" algn="l">
@@ -2378,6 +2431,7 @@
             <a:srgbClr val="111111"/>
           </a:solidFill>
           <a:latin typeface="+mn-lt"/>
+          <a:cs typeface="+mn-cs"/>
         </a:defRPr>
       </a:lvl5pPr>
       <a:lvl6pPr marL="0" indent="0" algn="l">
@@ -2396,6 +2450,7 @@
             <a:srgbClr val="111111"/>
           </a:solidFill>
           <a:latin typeface="+mn-lt"/>
+          <a:cs typeface="+mn-cs"/>
         </a:defRPr>
       </a:lvl6pPr>
       <a:lvl7pPr marL="0" indent="0" algn="l">
@@ -2414,6 +2469,7 @@
             <a:srgbClr val="111111"/>
           </a:solidFill>
           <a:latin typeface="+mn-lt"/>
+          <a:cs typeface="+mn-cs"/>
         </a:defRPr>
       </a:lvl7pPr>
       <a:lvl8pPr marL="0" indent="0" algn="l">
@@ -2432,6 +2488,7 @@
             <a:srgbClr val="111111"/>
           </a:solidFill>
           <a:latin typeface="+mn-lt"/>
+          <a:cs typeface="+mn-cs"/>
         </a:defRPr>
       </a:lvl8pPr>
       <a:lvl9pPr marL="0" indent="0" algn="l">
@@ -2450,6 +2507,7 @@
             <a:srgbClr val="111111"/>
           </a:solidFill>
           <a:latin typeface="+mn-lt"/>
+          <a:cs typeface="+mn-cs"/>
         </a:defRPr>
       </a:lvl9pPr>
     </p:otherStyle>
@@ -2661,12 +2719,12 @@
       <a:majorFont>
         <a:latin typeface="Arial"/>
         <a:ea typeface=""/>
-        <a:cs typeface=""/>
+        <a:cs typeface="Arial"/>
       </a:majorFont>
       <a:minorFont>
         <a:latin typeface="Arial"/>
         <a:ea typeface=""/>
-        <a:cs typeface=""/>
+        <a:cs typeface="Arial"/>
       </a:minorFont>
     </a:fontScheme>
     <a:fmtScheme name="swiss">
